--- a/pptx-asset-library/decks/01_tables/TBL_bulk_totalrow_v1.pptx
+++ b/pptx-asset-library/decks/01_tables/TBL_bulk_totalrow_v1.pptx
@@ -3189,7 +3189,7 @@
           <a:graphicData uri="http://schemas.openxmlformats.org/drawingml/2006/table">
             <a:tbl>
               <a:tblPr>
-                <a:tableStyleId>{2D5ABB26-0587-4C30-8999-92F81FD0307C}</a:tableStyleId>
+                <a:tableStyleId>{5C22544A-7EE6-4342-B048-85BDC9FD1C3A}</a:tableStyleId>
               </a:tblPr>
               <a:tblGrid>
                 <a:gridCol w="2651760"/>
@@ -4438,7 +4438,7 @@
           <a:graphicData uri="http://schemas.openxmlformats.org/drawingml/2006/table">
             <a:tbl>
               <a:tblPr>
-                <a:tableStyleId>{2D5ABB26-0587-4C30-8999-92F81FD0307C}</a:tableStyleId>
+                <a:tableStyleId>{5C22544A-7EE6-4342-B048-85BDC9FD1C3A}</a:tableStyleId>
               </a:tblPr>
               <a:tblGrid>
                 <a:gridCol w="2651760"/>
@@ -5869,7 +5869,7 @@
           <a:graphicData uri="http://schemas.openxmlformats.org/drawingml/2006/table">
             <a:tbl>
               <a:tblPr>
-                <a:tableStyleId>{2D5ABB26-0587-4C30-8999-92F81FD0307C}</a:tableStyleId>
+                <a:tableStyleId>{5C22544A-7EE6-4342-B048-85BDC9FD1C3A}</a:tableStyleId>
               </a:tblPr>
               <a:tblGrid>
                 <a:gridCol w="2651760"/>
@@ -7616,7 +7616,7 @@
           <a:graphicData uri="http://schemas.openxmlformats.org/drawingml/2006/table">
             <a:tbl>
               <a:tblPr>
-                <a:tableStyleId>{2D5ABB26-0587-4C30-8999-92F81FD0307C}</a:tableStyleId>
+                <a:tableStyleId>{5C22544A-7EE6-4342-B048-85BDC9FD1C3A}</a:tableStyleId>
               </a:tblPr>
               <a:tblGrid>
                 <a:gridCol w="2651760"/>
@@ -9679,7 +9679,7 @@
           <a:graphicData uri="http://schemas.openxmlformats.org/drawingml/2006/table">
             <a:tbl>
               <a:tblPr>
-                <a:tableStyleId>{2D5ABB26-0587-4C30-8999-92F81FD0307C}</a:tableStyleId>
+                <a:tableStyleId>{5C22544A-7EE6-4342-B048-85BDC9FD1C3A}</a:tableStyleId>
               </a:tblPr>
               <a:tblGrid>
                 <a:gridCol w="2651760"/>
@@ -11199,7 +11199,7 @@
           <a:graphicData uri="http://schemas.openxmlformats.org/drawingml/2006/table">
             <a:tbl>
               <a:tblPr>
-                <a:tableStyleId>{2D5ABB26-0587-4C30-8999-92F81FD0307C}</a:tableStyleId>
+                <a:tableStyleId>{5C22544A-7EE6-4342-B048-85BDC9FD1C3A}</a:tableStyleId>
               </a:tblPr>
               <a:tblGrid>
                 <a:gridCol w="2651760"/>
@@ -12990,7 +12990,7 @@
           <a:graphicData uri="http://schemas.openxmlformats.org/drawingml/2006/table">
             <a:tbl>
               <a:tblPr>
-                <a:tableStyleId>{2D5ABB26-0587-4C30-8999-92F81FD0307C}</a:tableStyleId>
+                <a:tableStyleId>{5C22544A-7EE6-4342-B048-85BDC9FD1C3A}</a:tableStyleId>
               </a:tblPr>
               <a:tblGrid>
                 <a:gridCol w="2651760"/>
@@ -14421,7 +14421,7 @@
           <a:graphicData uri="http://schemas.openxmlformats.org/drawingml/2006/table">
             <a:tbl>
               <a:tblPr>
-                <a:tableStyleId>{2D5ABB26-0587-4C30-8999-92F81FD0307C}</a:tableStyleId>
+                <a:tableStyleId>{5C22544A-7EE6-4342-B048-85BDC9FD1C3A}</a:tableStyleId>
               </a:tblPr>
               <a:tblGrid>
                 <a:gridCol w="2651760"/>
@@ -16168,7 +16168,7 @@
           <a:graphicData uri="http://schemas.openxmlformats.org/drawingml/2006/table">
             <a:tbl>
               <a:tblPr>
-                <a:tableStyleId>{2D5ABB26-0587-4C30-8999-92F81FD0307C}</a:tableStyleId>
+                <a:tableStyleId>{5C22544A-7EE6-4342-B048-85BDC9FD1C3A}</a:tableStyleId>
               </a:tblPr>
               <a:tblGrid>
                 <a:gridCol w="2651760"/>
@@ -18231,7 +18231,7 @@
           <a:graphicData uri="http://schemas.openxmlformats.org/drawingml/2006/table">
             <a:tbl>
               <a:tblPr>
-                <a:tableStyleId>{2D5ABB26-0587-4C30-8999-92F81FD0307C}</a:tableStyleId>
+                <a:tableStyleId>{5C22544A-7EE6-4342-B048-85BDC9FD1C3A}</a:tableStyleId>
               </a:tblPr>
               <a:tblGrid>
                 <a:gridCol w="2651760"/>
@@ -19480,7 +19480,7 @@
           <a:graphicData uri="http://schemas.openxmlformats.org/drawingml/2006/table">
             <a:tbl>
               <a:tblPr>
-                <a:tableStyleId>{2D5ABB26-0587-4C30-8999-92F81FD0307C}</a:tableStyleId>
+                <a:tableStyleId>{5C22544A-7EE6-4342-B048-85BDC9FD1C3A}</a:tableStyleId>
               </a:tblPr>
               <a:tblGrid>
                 <a:gridCol w="2651760"/>
@@ -21000,7 +21000,7 @@
           <a:graphicData uri="http://schemas.openxmlformats.org/drawingml/2006/table">
             <a:tbl>
               <a:tblPr>
-                <a:tableStyleId>{2D5ABB26-0587-4C30-8999-92F81FD0307C}</a:tableStyleId>
+                <a:tableStyleId>{5C22544A-7EE6-4342-B048-85BDC9FD1C3A}</a:tableStyleId>
               </a:tblPr>
               <a:tblGrid>
                 <a:gridCol w="2651760"/>
